--- a/poster_ieie_a4.pptx
+++ b/poster_ieie_a4.pptx
@@ -5390,7 +5390,7 @@
         <p:spPr>
           <a:xfrm>
             <a:off x="432000" y="1188000"/>
-            <a:ext cx="6696000" cy="5202936"/>
+            <a:ext cx="6696000" cy="6373368"/>
           </a:xfrm>
           <a:prstGeom prst="rect">
             <a:avLst/>
@@ -5443,7 +5443,7 @@
                 </a:solidFill>
                 <a:latin typeface="맑은 고딕"/>
               </a:rPr>
-              <a:t>• 1단계</a:t>
+              <a:t>• 우회</a:t>
             </a:r>
             <a:r>
               <a:rPr sz="2700" b="0">
@@ -5452,7 +5452,7 @@
                 </a:solidFill>
                 <a:latin typeface="맑은 고딕"/>
               </a:rPr>
-              <a:t>  궤도 프롬프트와 비디오 전파</a:t>
+              <a:t>  학습된 모델 대신 파운데이션 모델을 쓴다</a:t>
             </a:r>
           </a:p>
           <a:p>
@@ -5471,7 +5471,7 @@
                 </a:solidFill>
                 <a:latin typeface="맑은 고딕"/>
               </a:rPr>
-              <a:t>• 2단계</a:t>
+              <a:t>• 1단계</a:t>
             </a:r>
             <a:r>
               <a:rPr sz="2700" b="0">
@@ -5480,7 +5480,7 @@
                 </a:solidFill>
                 <a:latin typeface="맑은 고딕"/>
               </a:rPr>
-              <a:t>  마스크에서 레일 점열로 변환</a:t>
+              <a:t>  궤도 프롬프트와 비디오 전파</a:t>
             </a:r>
           </a:p>
           <a:p>
@@ -5499,6 +5499,34 @@
                 </a:solidFill>
                 <a:latin typeface="맑은 고딕"/>
               </a:rPr>
+              <a:t>• 2단계</a:t>
+            </a:r>
+            <a:r>
+              <a:rPr sz="2700" b="0">
+                <a:solidFill>
+                  <a:srgbClr val="47505C"/>
+                </a:solidFill>
+                <a:latin typeface="맑은 고딕"/>
+              </a:rPr>
+              <a:t>  마스크에서 레일 점열로 변환</a:t>
+            </a:r>
+          </a:p>
+          <a:p>
+            <a:pPr algn="l">
+              <a:lnSpc>
+                <a:spcPct val="134000"/>
+              </a:lnSpc>
+              <a:spcBef>
+                <a:spcPts val="1200"/>
+              </a:spcBef>
+            </a:pPr>
+            <a:r>
+              <a:rPr sz="2700" b="1">
+                <a:solidFill>
+                  <a:srgbClr val="1B262C"/>
+                </a:solidFill>
+                <a:latin typeface="맑은 고딕"/>
+              </a:rPr>
               <a:t>• 3단계</a:t>
             </a:r>
             <a:r>
@@ -5521,7 +5549,7 @@
         </p:nvSpPr>
         <p:spPr>
           <a:xfrm>
-            <a:off x="432000" y="6606936"/>
+            <a:off x="432000" y="7777368"/>
             <a:ext cx="6696000" cy="2427624"/>
           </a:xfrm>
           <a:prstGeom prst="rect">
@@ -5565,7 +5593,7 @@
         </p:nvSpPr>
         <p:spPr>
           <a:xfrm>
-            <a:off x="684000" y="6786935"/>
+            <a:off x="684000" y="7957367"/>
             <a:ext cx="6192000" cy="324000"/>
           </a:xfrm>
           <a:prstGeom prst="rect">
@@ -5604,7 +5632,7 @@
         </p:nvSpPr>
         <p:spPr>
           <a:xfrm>
-            <a:off x="684000" y="7182936"/>
+            <a:off x="684000" y="8353368"/>
             <a:ext cx="6192000" cy="1707625"/>
           </a:xfrm>
           <a:prstGeom prst="rect">
@@ -7593,7 +7621,7 @@
         <p:spPr>
           <a:xfrm>
             <a:off x="432000" y="1188000"/>
-            <a:ext cx="6696000" cy="1170432"/>
+            <a:ext cx="6696000" cy="5202936"/>
           </a:xfrm>
           <a:prstGeom prst="rect">
             <a:avLst/>
@@ -7628,6 +7656,90 @@
                 <a:latin typeface="맑은 고딕"/>
               </a:rPr>
               <a:t>  자동 시드만으로 290 프레임 전체에 전파되었다</a:t>
+            </a:r>
+          </a:p>
+          <a:p>
+            <a:pPr algn="l">
+              <a:lnSpc>
+                <a:spcPct val="134000"/>
+              </a:lnSpc>
+              <a:spcBef>
+                <a:spcPts val="1200"/>
+              </a:spcBef>
+            </a:pPr>
+            <a:r>
+              <a:rPr sz="2700" b="1">
+                <a:solidFill>
+                  <a:srgbClr val="1B262C"/>
+                </a:solidFill>
+                <a:latin typeface="맑은 고딕"/>
+              </a:rPr>
+              <a:t>• 범위</a:t>
+            </a:r>
+            <a:r>
+              <a:rPr sz="2700" b="0">
+                <a:solidFill>
+                  <a:srgbClr val="47505C"/>
+                </a:solidFill>
+                <a:latin typeface="맑은 고딕"/>
+              </a:rPr>
+              <a:t>  곡선 구간을 포함해 궤도 양측을 감쌌다</a:t>
+            </a:r>
+          </a:p>
+          <a:p>
+            <a:pPr algn="l">
+              <a:lnSpc>
+                <a:spcPct val="134000"/>
+              </a:lnSpc>
+              <a:spcBef>
+                <a:spcPts val="1200"/>
+              </a:spcBef>
+            </a:pPr>
+            <a:r>
+              <a:rPr sz="2700" b="1">
+                <a:solidFill>
+                  <a:srgbClr val="1B262C"/>
+                </a:solidFill>
+                <a:latin typeface="맑은 고딕"/>
+              </a:rPr>
+              <a:t>• 한계</a:t>
+            </a:r>
+            <a:r>
+              <a:rPr sz="2700" b="0">
+                <a:solidFill>
+                  <a:srgbClr val="47505C"/>
+                </a:solidFill>
+                <a:latin typeface="맑은 고딕"/>
+              </a:rPr>
+              <a:t>  마스크 경계의 국소적 흔들림으로 일부 프레임은 소폭 보정이 필요하다</a:t>
+            </a:r>
+          </a:p>
+          <a:p>
+            <a:pPr algn="l">
+              <a:lnSpc>
+                <a:spcPct val="134000"/>
+              </a:lnSpc>
+              <a:spcBef>
+                <a:spcPts val="1200"/>
+              </a:spcBef>
+            </a:pPr>
+            <a:r>
+              <a:rPr sz="2700" b="1">
+                <a:solidFill>
+                  <a:srgbClr val="1B262C"/>
+                </a:solidFill>
+                <a:latin typeface="맑은 고딕"/>
+              </a:rPr>
+              <a:t>• 의의</a:t>
+            </a:r>
+            <a:r>
+              <a:rPr sz="2700" b="0">
+                <a:solidFill>
+                  <a:srgbClr val="47505C"/>
+                </a:solidFill>
+                <a:latin typeface="맑은 고딕"/>
+              </a:rPr>
+              <a:t>  전 구간에서 초안이 성립해 기존 모델 기반 접근과 구별된다</a:t>
             </a:r>
           </a:p>
         </p:txBody>
@@ -7648,7 +7760,7 @@
         </p:blipFill>
         <p:spPr>
           <a:xfrm>
-            <a:off x="432000" y="2574432"/>
+            <a:off x="432000" y="6606936"/>
             <a:ext cx="6696000" cy="1238301"/>
           </a:xfrm>
           <a:prstGeom prst="rect">
@@ -7664,7 +7776,7 @@
         </p:nvSpPr>
         <p:spPr>
           <a:xfrm>
-            <a:off x="432000" y="3920733"/>
+            <a:off x="432000" y="7953237"/>
             <a:ext cx="6696000" cy="561340"/>
           </a:xfrm>
           <a:prstGeom prst="rect">
